--- a/(7.3) .pptx
+++ b/(7.3) .pptx
@@ -6,6 +6,14 @@
   </p:sldMasterIdLst>
   <p:sldIdLst>
     <p:sldId id="257" r:id="rId2"/>
+    <p:sldId id="259" r:id="rId3"/>
+    <p:sldId id="260" r:id="rId4"/>
+    <p:sldId id="258" r:id="rId5"/>
+    <p:sldId id="261" r:id="rId6"/>
+    <p:sldId id="262" r:id="rId7"/>
+    <p:sldId id="263" r:id="rId8"/>
+    <p:sldId id="264" r:id="rId9"/>
+    <p:sldId id="265" r:id="rId10"/>
   </p:sldIdLst>
   <p:sldSz cx="12192000" cy="6858000"/>
   <p:notesSz cx="6858000" cy="9144000"/>
@@ -104,6 +112,11 @@
       </a:defRPr>
     </a:lvl9pPr>
   </p:defaultTextStyle>
+  <p:extLst>
+    <p:ext uri="{EFAFB233-063F-42B5-8137-9DF3F51BA10A}">
+      <p15:sldGuideLst xmlns:p15="http://schemas.microsoft.com/office/powerpoint/2012/main"/>
+    </p:ext>
+  </p:extLst>
 </p:presentation>
 </file>
 
@@ -2976,10 +2989,36 @@
         </p:nvSpPr>
         <p:spPr/>
         <p:txBody>
-          <a:bodyPr/>
-          <a:lstStyle/>
-          <a:p>
-            <a:endParaRPr lang="ko-KR" altLang="en-US"/>
+          <a:bodyPr>
+            <a:normAutofit/>
+          </a:bodyPr>
+          <a:lstStyle/>
+          <a:p>
+            <a:r>
+              <a:rPr lang="ko-KR" altLang="en-US" sz="3200" smtClean="0"/>
+              <a:t>혼자서도 만들 수 있는 게임 </a:t>
+            </a:r>
+            <a:r>
+              <a:rPr lang="en-US" altLang="ko-KR" sz="3200" smtClean="0"/>
+              <a:t>– </a:t>
+            </a:r>
+            <a:r>
+              <a:rPr lang="ko-KR" altLang="en-US" sz="3200" smtClean="0"/>
+              <a:t>명작 중 명작 </a:t>
+            </a:r>
+            <a:r>
+              <a:rPr lang="en-US" altLang="ko-KR" sz="3200" smtClean="0"/>
+              <a:t>– [</a:t>
+            </a:r>
+            <a:r>
+              <a:rPr lang="ko-KR" altLang="en-US" sz="3200" smtClean="0"/>
+              <a:t>역전재판</a:t>
+            </a:r>
+            <a:r>
+              <a:rPr lang="en-US" altLang="ko-KR" sz="3200" smtClean="0"/>
+              <a:t>]</a:t>
+            </a:r>
+            <a:endParaRPr lang="ko-KR" altLang="en-US" sz="3200"/>
           </a:p>
         </p:txBody>
       </p:sp>
@@ -2998,6 +3037,34 @@
           <a:bodyPr/>
           <a:lstStyle/>
           <a:p>
+            <a:r>
+              <a:rPr lang="ko-KR" altLang="en-US" smtClean="0"/>
+              <a:t>잘 만든 비주얼 노벨 예시</a:t>
+            </a:r>
+            <a:endParaRPr lang="en-US" altLang="ko-KR" smtClean="0"/>
+          </a:p>
+          <a:p>
+            <a:r>
+              <a:rPr lang="ko-KR" altLang="en-US" smtClean="0"/>
+              <a:t>대사를 잘 보자</a:t>
+            </a:r>
+            <a:r>
+              <a:rPr lang="en-US" altLang="ko-KR" smtClean="0"/>
+              <a:t>.</a:t>
+            </a:r>
+          </a:p>
+          <a:p>
+            <a:endParaRPr lang="en-US" altLang="ko-KR"/>
+          </a:p>
+          <a:p>
+            <a:r>
+              <a:rPr lang="ko-KR" altLang="en-US" smtClean="0"/>
+              <a:t>진행 대사의 이벤트와 내용만으로 게임 에피소드 하나가 순식간에 끝났다</a:t>
+            </a:r>
+            <a:r>
+              <a:rPr lang="en-US" altLang="ko-KR" smtClean="0"/>
+              <a:t>.</a:t>
+            </a:r>
             <a:endParaRPr lang="ko-KR" altLang="en-US"/>
           </a:p>
         </p:txBody>
@@ -3006,6 +3073,991 @@
     <p:extLst>
       <p:ext uri="{BB962C8B-B14F-4D97-AF65-F5344CB8AC3E}">
         <p14:creationId xmlns:p14="http://schemas.microsoft.com/office/powerpoint/2010/main" val="126648852"/>
+      </p:ext>
+    </p:extLst>
+  </p:cSld>
+  <p:clrMapOvr>
+    <a:masterClrMapping/>
+  </p:clrMapOvr>
+</p:sld>
+</file>
+
+<file path=ppt/slides/slide2.xml><?xml version="1.0" encoding="utf-8"?>
+<p:sld xmlns:a="http://schemas.openxmlformats.org/drawingml/2006/main" xmlns:r="http://schemas.openxmlformats.org/officeDocument/2006/relationships" xmlns:p="http://schemas.openxmlformats.org/presentationml/2006/main">
+  <p:cSld>
+    <p:spTree>
+      <p:nvGrpSpPr>
+        <p:cNvPr id="1" name=""/>
+        <p:cNvGrpSpPr/>
+        <p:nvPr/>
+      </p:nvGrpSpPr>
+      <p:grpSpPr>
+        <a:xfrm>
+          <a:off x="0" y="0"/>
+          <a:ext cx="0" cy="0"/>
+          <a:chOff x="0" y="0"/>
+          <a:chExt cx="0" cy="0"/>
+        </a:xfrm>
+      </p:grpSpPr>
+      <p:sp>
+        <p:nvSpPr>
+          <p:cNvPr id="2" name="제목 1"/>
+          <p:cNvSpPr>
+            <a:spLocks noGrp="1"/>
+          </p:cNvSpPr>
+          <p:nvPr>
+            <p:ph type="title"/>
+          </p:nvPr>
+        </p:nvSpPr>
+        <p:spPr/>
+        <p:txBody>
+          <a:bodyPr>
+            <a:normAutofit/>
+          </a:bodyPr>
+          <a:lstStyle/>
+          <a:p>
+            <a:r>
+              <a:rPr lang="en-US" altLang="ko-KR" sz="3200" smtClean="0"/>
+              <a:t>[</a:t>
+            </a:r>
+            <a:r>
+              <a:rPr lang="ko-KR" altLang="en-US" sz="3200" smtClean="0"/>
+              <a:t>산나비</a:t>
+            </a:r>
+            <a:r>
+              <a:rPr lang="en-US" altLang="ko-KR" sz="3200" smtClean="0"/>
+              <a:t>] – 5</a:t>
+            </a:r>
+            <a:r>
+              <a:rPr lang="ko-KR" altLang="en-US" sz="3200" smtClean="0"/>
+              <a:t>챕터</a:t>
+            </a:r>
+            <a:endParaRPr lang="ko-KR" altLang="en-US" sz="3200"/>
+          </a:p>
+        </p:txBody>
+      </p:sp>
+      <p:sp>
+        <p:nvSpPr>
+          <p:cNvPr id="3" name="내용 개체 틀 2"/>
+          <p:cNvSpPr>
+            <a:spLocks noGrp="1"/>
+          </p:cNvSpPr>
+          <p:nvPr>
+            <p:ph idx="1"/>
+          </p:nvPr>
+        </p:nvSpPr>
+        <p:spPr/>
+        <p:txBody>
+          <a:bodyPr/>
+          <a:lstStyle/>
+          <a:p>
+            <a:r>
+              <a:rPr lang="ko-KR" altLang="en-US" smtClean="0"/>
+              <a:t>대사와 연출력의 힘을 느낄 수 있다</a:t>
+            </a:r>
+            <a:r>
+              <a:rPr lang="en-US" altLang="ko-KR" smtClean="0"/>
+              <a:t>.</a:t>
+            </a:r>
+            <a:endParaRPr lang="ko-KR" altLang="en-US"/>
+          </a:p>
+        </p:txBody>
+      </p:sp>
+    </p:spTree>
+    <p:extLst>
+      <p:ext uri="{BB962C8B-B14F-4D97-AF65-F5344CB8AC3E}">
+        <p14:creationId xmlns:p14="http://schemas.microsoft.com/office/powerpoint/2010/main" val="1410183582"/>
+      </p:ext>
+    </p:extLst>
+  </p:cSld>
+  <p:clrMapOvr>
+    <a:masterClrMapping/>
+  </p:clrMapOvr>
+</p:sld>
+</file>
+
+<file path=ppt/slides/slide3.xml><?xml version="1.0" encoding="utf-8"?>
+<p:sld xmlns:a="http://schemas.openxmlformats.org/drawingml/2006/main" xmlns:r="http://schemas.openxmlformats.org/officeDocument/2006/relationships" xmlns:p="http://schemas.openxmlformats.org/presentationml/2006/main">
+  <p:cSld>
+    <p:spTree>
+      <p:nvGrpSpPr>
+        <p:cNvPr id="1" name=""/>
+        <p:cNvGrpSpPr/>
+        <p:nvPr/>
+      </p:nvGrpSpPr>
+      <p:grpSpPr>
+        <a:xfrm>
+          <a:off x="0" y="0"/>
+          <a:ext cx="0" cy="0"/>
+          <a:chOff x="0" y="0"/>
+          <a:chExt cx="0" cy="0"/>
+        </a:xfrm>
+      </p:grpSpPr>
+      <p:sp>
+        <p:nvSpPr>
+          <p:cNvPr id="2" name="제목 1"/>
+          <p:cNvSpPr>
+            <a:spLocks noGrp="1"/>
+          </p:cNvSpPr>
+          <p:nvPr>
+            <p:ph type="title"/>
+          </p:nvPr>
+        </p:nvSpPr>
+        <p:spPr/>
+        <p:txBody>
+          <a:bodyPr/>
+          <a:lstStyle/>
+          <a:p>
+            <a:r>
+              <a:rPr lang="ko-KR" altLang="en-US" smtClean="0"/>
+              <a:t>퀘스트</a:t>
+            </a:r>
+            <a:endParaRPr lang="ko-KR" altLang="en-US"/>
+          </a:p>
+        </p:txBody>
+      </p:sp>
+      <p:sp>
+        <p:nvSpPr>
+          <p:cNvPr id="3" name="내용 개체 틀 2"/>
+          <p:cNvSpPr>
+            <a:spLocks noGrp="1"/>
+          </p:cNvSpPr>
+          <p:nvPr>
+            <p:ph idx="1"/>
+          </p:nvPr>
+        </p:nvSpPr>
+        <p:spPr/>
+        <p:txBody>
+          <a:bodyPr/>
+          <a:lstStyle/>
+          <a:p>
+            <a:r>
+              <a:rPr lang="ko-KR" altLang="en-US" smtClean="0"/>
+              <a:t>리소스를 가지고 이야기</a:t>
+            </a:r>
+            <a:r>
+              <a:rPr lang="en-US" altLang="ko-KR" smtClean="0"/>
+              <a:t>/</a:t>
+            </a:r>
+            <a:r>
+              <a:rPr lang="ko-KR" altLang="en-US" smtClean="0"/>
+              <a:t>플레이의 흐름을 리드한다</a:t>
+            </a:r>
+            <a:r>
+              <a:rPr lang="en-US" altLang="ko-KR" smtClean="0"/>
+              <a:t>.</a:t>
+            </a:r>
+          </a:p>
+          <a:p>
+            <a:r>
+              <a:rPr lang="ko-KR" altLang="en-US" smtClean="0"/>
+              <a:t>리소스는 연출에 의해 보여주고 들려주고</a:t>
+            </a:r>
+            <a:r>
+              <a:rPr lang="en-US" altLang="ko-KR" smtClean="0"/>
+              <a:t>. </a:t>
+            </a:r>
+            <a:r>
+              <a:rPr lang="ko-KR" altLang="en-US" smtClean="0"/>
+              <a:t>영화처럼</a:t>
+            </a:r>
+            <a:r>
+              <a:rPr lang="en-US" altLang="ko-KR" smtClean="0"/>
+              <a:t>.</a:t>
+            </a:r>
+          </a:p>
+          <a:p>
+            <a:r>
+              <a:rPr lang="en-US" altLang="ko-KR" smtClean="0"/>
+              <a:t>Cinematic + Narrative</a:t>
+            </a:r>
+          </a:p>
+          <a:p>
+            <a:endParaRPr lang="en-US" altLang="ko-KR"/>
+          </a:p>
+          <a:p>
+            <a:r>
+              <a:rPr lang="ko-KR" altLang="en-US" smtClean="0"/>
+              <a:t>우리의 공간</a:t>
+            </a:r>
+            <a:r>
+              <a:rPr lang="en-US" altLang="ko-KR" smtClean="0"/>
+              <a:t>/</a:t>
+            </a:r>
+            <a:r>
+              <a:rPr lang="ko-KR" altLang="en-US" smtClean="0"/>
+              <a:t>캐릭터</a:t>
+            </a:r>
+            <a:r>
+              <a:rPr lang="en-US" altLang="ko-KR" smtClean="0"/>
+              <a:t>/</a:t>
+            </a:r>
+            <a:r>
+              <a:rPr lang="ko-KR" altLang="en-US" smtClean="0"/>
+              <a:t>대본에 이유를 제대로 구체화하자</a:t>
+            </a:r>
+            <a:r>
+              <a:rPr lang="en-US" altLang="ko-KR" smtClean="0"/>
+              <a:t>.</a:t>
+            </a:r>
+            <a:endParaRPr lang="ko-KR" altLang="en-US"/>
+          </a:p>
+        </p:txBody>
+      </p:sp>
+    </p:spTree>
+    <p:extLst>
+      <p:ext uri="{BB962C8B-B14F-4D97-AF65-F5344CB8AC3E}">
+        <p14:creationId xmlns:p14="http://schemas.microsoft.com/office/powerpoint/2010/main" val="2811136929"/>
+      </p:ext>
+    </p:extLst>
+  </p:cSld>
+  <p:clrMapOvr>
+    <a:masterClrMapping/>
+  </p:clrMapOvr>
+</p:sld>
+</file>
+
+<file path=ppt/slides/slide4.xml><?xml version="1.0" encoding="utf-8"?>
+<p:sld xmlns:a="http://schemas.openxmlformats.org/drawingml/2006/main" xmlns:r="http://schemas.openxmlformats.org/officeDocument/2006/relationships" xmlns:p="http://schemas.openxmlformats.org/presentationml/2006/main">
+  <p:cSld>
+    <p:spTree>
+      <p:nvGrpSpPr>
+        <p:cNvPr id="1" name=""/>
+        <p:cNvGrpSpPr/>
+        <p:nvPr/>
+      </p:nvGrpSpPr>
+      <p:grpSpPr>
+        <a:xfrm>
+          <a:off x="0" y="0"/>
+          <a:ext cx="0" cy="0"/>
+          <a:chOff x="0" y="0"/>
+          <a:chExt cx="0" cy="0"/>
+        </a:xfrm>
+      </p:grpSpPr>
+      <p:pic>
+        <p:nvPicPr>
+          <p:cNvPr id="4" name="그림 3"/>
+          <p:cNvPicPr>
+            <a:picLocks noChangeAspect="1"/>
+          </p:cNvPicPr>
+          <p:nvPr/>
+        </p:nvPicPr>
+        <p:blipFill>
+          <a:blip r:embed="rId2"/>
+          <a:stretch>
+            <a:fillRect/>
+          </a:stretch>
+        </p:blipFill>
+        <p:spPr>
+          <a:xfrm>
+            <a:off x="381000" y="718917"/>
+            <a:ext cx="11430000" cy="5420166"/>
+          </a:xfrm>
+          <a:prstGeom prst="rect">
+            <a:avLst/>
+          </a:prstGeom>
+        </p:spPr>
+      </p:pic>
+    </p:spTree>
+    <p:extLst>
+      <p:ext uri="{BB962C8B-B14F-4D97-AF65-F5344CB8AC3E}">
+        <p14:creationId xmlns:p14="http://schemas.microsoft.com/office/powerpoint/2010/main" val="3827394039"/>
+      </p:ext>
+    </p:extLst>
+  </p:cSld>
+  <p:clrMapOvr>
+    <a:masterClrMapping/>
+  </p:clrMapOvr>
+</p:sld>
+</file>
+
+<file path=ppt/slides/slide5.xml><?xml version="1.0" encoding="utf-8"?>
+<p:sld xmlns:a="http://schemas.openxmlformats.org/drawingml/2006/main" xmlns:r="http://schemas.openxmlformats.org/officeDocument/2006/relationships" xmlns:p="http://schemas.openxmlformats.org/presentationml/2006/main">
+  <p:cSld>
+    <p:spTree>
+      <p:nvGrpSpPr>
+        <p:cNvPr id="1" name=""/>
+        <p:cNvGrpSpPr/>
+        <p:nvPr/>
+      </p:nvGrpSpPr>
+      <p:grpSpPr>
+        <a:xfrm>
+          <a:off x="0" y="0"/>
+          <a:ext cx="0" cy="0"/>
+          <a:chOff x="0" y="0"/>
+          <a:chExt cx="0" cy="0"/>
+        </a:xfrm>
+      </p:grpSpPr>
+      <p:pic>
+        <p:nvPicPr>
+          <p:cNvPr id="4" name="그림 3"/>
+          <p:cNvPicPr>
+            <a:picLocks noChangeAspect="1"/>
+          </p:cNvPicPr>
+          <p:nvPr/>
+        </p:nvPicPr>
+        <p:blipFill>
+          <a:blip r:embed="rId2"/>
+          <a:stretch>
+            <a:fillRect/>
+          </a:stretch>
+        </p:blipFill>
+        <p:spPr>
+          <a:xfrm>
+            <a:off x="549309" y="800100"/>
+            <a:ext cx="11093382" cy="5257800"/>
+          </a:xfrm>
+          <a:prstGeom prst="rect">
+            <a:avLst/>
+          </a:prstGeom>
+        </p:spPr>
+      </p:pic>
+    </p:spTree>
+    <p:extLst>
+      <p:ext uri="{BB962C8B-B14F-4D97-AF65-F5344CB8AC3E}">
+        <p14:creationId xmlns:p14="http://schemas.microsoft.com/office/powerpoint/2010/main" val="512486563"/>
+      </p:ext>
+    </p:extLst>
+  </p:cSld>
+  <p:clrMapOvr>
+    <a:masterClrMapping/>
+  </p:clrMapOvr>
+</p:sld>
+</file>
+
+<file path=ppt/slides/slide6.xml><?xml version="1.0" encoding="utf-8"?>
+<p:sld xmlns:a="http://schemas.openxmlformats.org/drawingml/2006/main" xmlns:r="http://schemas.openxmlformats.org/officeDocument/2006/relationships" xmlns:p="http://schemas.openxmlformats.org/presentationml/2006/main">
+  <p:cSld>
+    <p:spTree>
+      <p:nvGrpSpPr>
+        <p:cNvPr id="1" name=""/>
+        <p:cNvGrpSpPr/>
+        <p:nvPr/>
+      </p:nvGrpSpPr>
+      <p:grpSpPr>
+        <a:xfrm>
+          <a:off x="0" y="0"/>
+          <a:ext cx="0" cy="0"/>
+          <a:chOff x="0" y="0"/>
+          <a:chExt cx="0" cy="0"/>
+        </a:xfrm>
+      </p:grpSpPr>
+      <p:sp>
+        <p:nvSpPr>
+          <p:cNvPr id="2" name="제목 1"/>
+          <p:cNvSpPr>
+            <a:spLocks noGrp="1"/>
+          </p:cNvSpPr>
+          <p:nvPr>
+            <p:ph type="title"/>
+          </p:nvPr>
+        </p:nvSpPr>
+        <p:spPr/>
+        <p:txBody>
+          <a:bodyPr/>
+          <a:lstStyle/>
+          <a:p>
+            <a:r>
+              <a:rPr lang="ko-KR" altLang="en-US" smtClean="0"/>
+              <a:t>진행 대사 엑셀 파일</a:t>
+            </a:r>
+            <a:endParaRPr lang="ko-KR" altLang="en-US"/>
+          </a:p>
+        </p:txBody>
+      </p:sp>
+      <p:sp>
+        <p:nvSpPr>
+          <p:cNvPr id="3" name="내용 개체 틀 2"/>
+          <p:cNvSpPr>
+            <a:spLocks noGrp="1"/>
+          </p:cNvSpPr>
+          <p:nvPr>
+            <p:ph idx="1"/>
+          </p:nvPr>
+        </p:nvSpPr>
+        <p:spPr/>
+        <p:txBody>
+          <a:bodyPr/>
+          <a:lstStyle/>
+          <a:p>
+            <a:r>
+              <a:rPr lang="ko-KR" altLang="en-US" smtClean="0"/>
+              <a:t>시나리오 </a:t>
+            </a:r>
+            <a:r>
+              <a:rPr lang="en-US" altLang="ko-KR" smtClean="0"/>
+              <a:t>/ </a:t>
+            </a:r>
+            <a:r>
+              <a:rPr lang="ko-KR" altLang="en-US" smtClean="0"/>
+              <a:t>퀘스트 디자이너 포트폴리오로 모두 사용 가능</a:t>
+            </a:r>
+            <a:endParaRPr lang="en-US" altLang="ko-KR" smtClean="0"/>
+          </a:p>
+          <a:p>
+            <a:endParaRPr lang="en-US" altLang="ko-KR"/>
+          </a:p>
+          <a:p>
+            <a:r>
+              <a:rPr lang="ko-KR" altLang="en-US" smtClean="0"/>
+              <a:t>퀘스트 제목</a:t>
+            </a:r>
+            <a:endParaRPr lang="en-US" altLang="ko-KR" smtClean="0"/>
+          </a:p>
+          <a:p>
+            <a:endParaRPr lang="en-US" altLang="ko-KR"/>
+          </a:p>
+          <a:p>
+            <a:r>
+              <a:rPr lang="ko-KR" altLang="en-US" smtClean="0"/>
+              <a:t>화자</a:t>
+            </a:r>
+            <a:endParaRPr lang="en-US" altLang="ko-KR" smtClean="0"/>
+          </a:p>
+          <a:p>
+            <a:pPr lvl="1"/>
+            <a:r>
+              <a:rPr lang="ko-KR" altLang="en-US" smtClean="0"/>
+              <a:t>대사마다 화자를 다 넣어주기</a:t>
+            </a:r>
+            <a:endParaRPr lang="en-US" altLang="ko-KR" smtClean="0"/>
+          </a:p>
+          <a:p>
+            <a:pPr lvl="1"/>
+            <a:r>
+              <a:rPr lang="ko-KR" altLang="en-US" smtClean="0"/>
+              <a:t>연출에서 </a:t>
+            </a:r>
+            <a:r>
+              <a:rPr lang="en-US" altLang="ko-KR" smtClean="0"/>
+              <a:t>‘( )’</a:t>
+            </a:r>
+            <a:r>
+              <a:rPr lang="ko-KR" altLang="en-US" smtClean="0"/>
+              <a:t>는 연극의 지시문같은 것</a:t>
+            </a:r>
+            <a:endParaRPr lang="en-US" altLang="ko-KR" smtClean="0"/>
+          </a:p>
+          <a:p>
+            <a:pPr lvl="1"/>
+            <a:r>
+              <a:rPr lang="ko-KR" altLang="en-US" smtClean="0"/>
+              <a:t>구현지시문 </a:t>
+            </a:r>
+            <a:r>
+              <a:rPr lang="en-US" altLang="ko-KR" smtClean="0"/>
+              <a:t>: UI, </a:t>
+            </a:r>
+            <a:r>
+              <a:rPr lang="ko-KR" altLang="en-US" smtClean="0"/>
+              <a:t>시스템</a:t>
+            </a:r>
+            <a:r>
+              <a:rPr lang="en-US" altLang="ko-KR" smtClean="0"/>
+              <a:t>, </a:t>
+            </a:r>
+            <a:r>
+              <a:rPr lang="ko-KR" altLang="en-US" smtClean="0"/>
+              <a:t>리소스 호출 등</a:t>
+            </a:r>
+            <a:endParaRPr lang="en-US" altLang="ko-KR"/>
+          </a:p>
+          <a:p>
+            <a:endParaRPr lang="ko-KR" altLang="en-US"/>
+          </a:p>
+        </p:txBody>
+      </p:sp>
+    </p:spTree>
+    <p:extLst>
+      <p:ext uri="{BB962C8B-B14F-4D97-AF65-F5344CB8AC3E}">
+        <p14:creationId xmlns:p14="http://schemas.microsoft.com/office/powerpoint/2010/main" val="2076313862"/>
+      </p:ext>
+    </p:extLst>
+  </p:cSld>
+  <p:clrMapOvr>
+    <a:masterClrMapping/>
+  </p:clrMapOvr>
+</p:sld>
+</file>
+
+<file path=ppt/slides/slide7.xml><?xml version="1.0" encoding="utf-8"?>
+<p:sld xmlns:a="http://schemas.openxmlformats.org/drawingml/2006/main" xmlns:r="http://schemas.openxmlformats.org/officeDocument/2006/relationships" xmlns:p="http://schemas.openxmlformats.org/presentationml/2006/main">
+  <p:cSld>
+    <p:spTree>
+      <p:nvGrpSpPr>
+        <p:cNvPr id="1" name=""/>
+        <p:cNvGrpSpPr/>
+        <p:nvPr/>
+      </p:nvGrpSpPr>
+      <p:grpSpPr>
+        <a:xfrm>
+          <a:off x="0" y="0"/>
+          <a:ext cx="0" cy="0"/>
+          <a:chOff x="0" y="0"/>
+          <a:chExt cx="0" cy="0"/>
+        </a:xfrm>
+      </p:grpSpPr>
+      <p:sp>
+        <p:nvSpPr>
+          <p:cNvPr id="2" name="제목 1"/>
+          <p:cNvSpPr>
+            <a:spLocks noGrp="1"/>
+          </p:cNvSpPr>
+          <p:nvPr>
+            <p:ph type="title"/>
+          </p:nvPr>
+        </p:nvSpPr>
+        <p:spPr/>
+        <p:txBody>
+          <a:bodyPr/>
+          <a:lstStyle/>
+          <a:p>
+            <a:r>
+              <a:rPr lang="ko-KR" altLang="en-US" smtClean="0"/>
+              <a:t>진행 대사 엑셀 파일</a:t>
+            </a:r>
+            <a:endParaRPr lang="ko-KR" altLang="en-US"/>
+          </a:p>
+        </p:txBody>
+      </p:sp>
+      <p:sp>
+        <p:nvSpPr>
+          <p:cNvPr id="3" name="내용 개체 틀 2"/>
+          <p:cNvSpPr>
+            <a:spLocks noGrp="1"/>
+          </p:cNvSpPr>
+          <p:nvPr>
+            <p:ph idx="1"/>
+          </p:nvPr>
+        </p:nvSpPr>
+        <p:spPr/>
+        <p:txBody>
+          <a:bodyPr/>
+          <a:lstStyle/>
+          <a:p>
+            <a:r>
+              <a:rPr lang="ko-KR" altLang="en-US" smtClean="0"/>
+              <a:t>대사 출력 시간</a:t>
+            </a:r>
+            <a:r>
+              <a:rPr lang="en-US" altLang="ko-KR" smtClean="0"/>
+              <a:t>(</a:t>
+            </a:r>
+            <a:r>
+              <a:rPr lang="ko-KR" altLang="en-US" smtClean="0"/>
+              <a:t>초</a:t>
+            </a:r>
+            <a:r>
+              <a:rPr lang="en-US" altLang="ko-KR" smtClean="0"/>
+              <a:t>) : </a:t>
+            </a:r>
+            <a:r>
+              <a:rPr lang="ko-KR" altLang="en-US" smtClean="0"/>
+              <a:t>상황의 급박함이나 분위기를 연출 가능</a:t>
+            </a:r>
+            <a:endParaRPr lang="en-US" altLang="ko-KR" smtClean="0"/>
+          </a:p>
+          <a:p>
+            <a:endParaRPr lang="en-US" altLang="ko-KR"/>
+          </a:p>
+          <a:p>
+            <a:r>
+              <a:rPr lang="ko-KR" altLang="en-US" smtClean="0"/>
+              <a:t>글자 연출 </a:t>
+            </a:r>
+            <a:r>
+              <a:rPr lang="en-US" altLang="ko-KR" smtClean="0"/>
+              <a:t>: </a:t>
+            </a:r>
+            <a:r>
+              <a:rPr lang="ko-KR" altLang="en-US" smtClean="0"/>
+              <a:t>스타카도</a:t>
+            </a:r>
+            <a:r>
+              <a:rPr lang="en-US" altLang="ko-KR" smtClean="0"/>
+              <a:t>, </a:t>
+            </a:r>
+            <a:r>
+              <a:rPr lang="ko-KR" altLang="en-US" smtClean="0"/>
+              <a:t>글자 크기 등</a:t>
+            </a:r>
+            <a:endParaRPr lang="en-US" altLang="ko-KR" smtClean="0"/>
+          </a:p>
+          <a:p>
+            <a:endParaRPr lang="en-US" altLang="ko-KR"/>
+          </a:p>
+          <a:p>
+            <a:r>
+              <a:rPr lang="ko-KR" altLang="en-US" smtClean="0"/>
+              <a:t>성우 </a:t>
+            </a:r>
+            <a:r>
+              <a:rPr lang="en-US" altLang="ko-KR" smtClean="0"/>
+              <a:t>: </a:t>
+            </a:r>
+            <a:r>
+              <a:rPr lang="ko-KR" altLang="en-US" smtClean="0"/>
+              <a:t>실제 성우 이름을 적으면 된다</a:t>
+            </a:r>
+            <a:r>
+              <a:rPr lang="en-US" altLang="ko-KR" smtClean="0"/>
+              <a:t>. </a:t>
+            </a:r>
+            <a:r>
+              <a:rPr lang="ko-KR" altLang="en-US" smtClean="0"/>
+              <a:t>가상 캐스팅</a:t>
+            </a:r>
+            <a:endParaRPr lang="en-US" altLang="ko-KR" smtClean="0"/>
+          </a:p>
+          <a:p>
+            <a:endParaRPr lang="en-US" altLang="ko-KR"/>
+          </a:p>
+          <a:p>
+            <a:r>
+              <a:rPr lang="ko-KR" altLang="en-US" smtClean="0"/>
+              <a:t>감정선 </a:t>
+            </a:r>
+            <a:r>
+              <a:rPr lang="en-US" altLang="ko-KR" smtClean="0"/>
+              <a:t>: </a:t>
+            </a:r>
+            <a:r>
+              <a:rPr lang="ko-KR" altLang="en-US" smtClean="0"/>
+              <a:t>대사할 때 어떤 감정인지에 대해 꼭 필요한 부분에만 넣어주면 된다</a:t>
+            </a:r>
+            <a:r>
+              <a:rPr lang="en-US" altLang="ko-KR" smtClean="0"/>
+              <a:t>.</a:t>
+            </a:r>
+            <a:endParaRPr lang="ko-KR" altLang="en-US"/>
+          </a:p>
+        </p:txBody>
+      </p:sp>
+    </p:spTree>
+    <p:extLst>
+      <p:ext uri="{BB962C8B-B14F-4D97-AF65-F5344CB8AC3E}">
+        <p14:creationId xmlns:p14="http://schemas.microsoft.com/office/powerpoint/2010/main" val="298756966"/>
+      </p:ext>
+    </p:extLst>
+  </p:cSld>
+  <p:clrMapOvr>
+    <a:masterClrMapping/>
+  </p:clrMapOvr>
+</p:sld>
+</file>
+
+<file path=ppt/slides/slide8.xml><?xml version="1.0" encoding="utf-8"?>
+<p:sld xmlns:a="http://schemas.openxmlformats.org/drawingml/2006/main" xmlns:r="http://schemas.openxmlformats.org/officeDocument/2006/relationships" xmlns:p="http://schemas.openxmlformats.org/presentationml/2006/main">
+  <p:cSld>
+    <p:spTree>
+      <p:nvGrpSpPr>
+        <p:cNvPr id="1" name=""/>
+        <p:cNvGrpSpPr/>
+        <p:nvPr/>
+      </p:nvGrpSpPr>
+      <p:grpSpPr>
+        <a:xfrm>
+          <a:off x="0" y="0"/>
+          <a:ext cx="0" cy="0"/>
+          <a:chOff x="0" y="0"/>
+          <a:chExt cx="0" cy="0"/>
+        </a:xfrm>
+      </p:grpSpPr>
+      <p:sp>
+        <p:nvSpPr>
+          <p:cNvPr id="2" name="제목 1"/>
+          <p:cNvSpPr>
+            <a:spLocks noGrp="1"/>
+          </p:cNvSpPr>
+          <p:nvPr>
+            <p:ph type="title"/>
+          </p:nvPr>
+        </p:nvSpPr>
+        <p:spPr/>
+        <p:txBody>
+          <a:bodyPr/>
+          <a:lstStyle/>
+          <a:p>
+            <a:r>
+              <a:rPr lang="ko-KR" altLang="en-US" smtClean="0"/>
+              <a:t>진행 대사 엑셀 파일</a:t>
+            </a:r>
+            <a:endParaRPr lang="ko-KR" altLang="en-US"/>
+          </a:p>
+        </p:txBody>
+      </p:sp>
+      <p:sp>
+        <p:nvSpPr>
+          <p:cNvPr id="3" name="내용 개체 틀 2"/>
+          <p:cNvSpPr>
+            <a:spLocks noGrp="1"/>
+          </p:cNvSpPr>
+          <p:nvPr>
+            <p:ph idx="1"/>
+          </p:nvPr>
+        </p:nvSpPr>
+        <p:spPr/>
+        <p:txBody>
+          <a:bodyPr/>
+          <a:lstStyle/>
+          <a:p>
+            <a:r>
+              <a:rPr lang="en-US" altLang="ko-KR" smtClean="0"/>
+              <a:t>‘</a:t>
+            </a:r>
+            <a:r>
+              <a:rPr lang="ko-KR" altLang="en-US" smtClean="0"/>
+              <a:t>선택 </a:t>
+            </a:r>
+            <a:r>
+              <a:rPr lang="en-US" altLang="ko-KR" smtClean="0"/>
+              <a:t>(</a:t>
+            </a:r>
+            <a:r>
+              <a:rPr lang="ko-KR" altLang="en-US" smtClean="0"/>
+              <a:t>번호</a:t>
+            </a:r>
+            <a:r>
+              <a:rPr lang="en-US" altLang="ko-KR" smtClean="0"/>
+              <a:t>)’</a:t>
+            </a:r>
+            <a:r>
+              <a:rPr lang="ko-KR" altLang="en-US" smtClean="0"/>
+              <a:t>와 </a:t>
+            </a:r>
+            <a:r>
+              <a:rPr lang="en-US" altLang="ko-KR" smtClean="0"/>
+              <a:t>‘</a:t>
+            </a:r>
+            <a:r>
+              <a:rPr lang="ko-KR" altLang="en-US" smtClean="0"/>
+              <a:t>명령</a:t>
+            </a:r>
+            <a:r>
+              <a:rPr lang="en-US" altLang="ko-KR" smtClean="0"/>
+              <a:t>(</a:t>
+            </a:r>
+            <a:r>
+              <a:rPr lang="ko-KR" altLang="en-US" smtClean="0"/>
+              <a:t>선택 </a:t>
+            </a:r>
+            <a:r>
+              <a:rPr lang="en-US" altLang="ko-KR" smtClean="0"/>
+              <a:t>(</a:t>
+            </a:r>
+            <a:r>
+              <a:rPr lang="ko-KR" altLang="en-US" smtClean="0"/>
+              <a:t>번호</a:t>
+            </a:r>
+            <a:r>
+              <a:rPr lang="en-US" altLang="ko-KR" smtClean="0"/>
+              <a:t>))’</a:t>
+            </a:r>
+            <a:r>
+              <a:rPr lang="ko-KR" altLang="en-US" smtClean="0"/>
+              <a:t>는 하나의 세트</a:t>
+            </a:r>
+            <a:endParaRPr lang="en-US" altLang="ko-KR" smtClean="0"/>
+          </a:p>
+          <a:p>
+            <a:r>
+              <a:rPr lang="ko-KR" altLang="en-US" smtClean="0"/>
+              <a:t>선택지를 선택 후 넘어가는 선택지를 몇 번 대사로 넘어가는 지를 </a:t>
+            </a:r>
+            <a:r>
+              <a:rPr lang="en-US" altLang="ko-KR" smtClean="0"/>
+              <a:t>‘</a:t>
+            </a:r>
+            <a:r>
+              <a:rPr lang="ko-KR" altLang="en-US" smtClean="0"/>
+              <a:t>구현지시문</a:t>
+            </a:r>
+            <a:r>
+              <a:rPr lang="en-US" altLang="ko-KR" smtClean="0"/>
+              <a:t>’</a:t>
+            </a:r>
+            <a:r>
+              <a:rPr lang="ko-KR" altLang="en-US" smtClean="0"/>
+              <a:t>을 추가해서 적어주면 된다</a:t>
+            </a:r>
+            <a:r>
+              <a:rPr lang="en-US" altLang="ko-KR" smtClean="0"/>
+              <a:t>.</a:t>
+            </a:r>
+          </a:p>
+          <a:p>
+            <a:endParaRPr lang="en-US" altLang="ko-KR"/>
+          </a:p>
+        </p:txBody>
+      </p:sp>
+    </p:spTree>
+    <p:extLst>
+      <p:ext uri="{BB962C8B-B14F-4D97-AF65-F5344CB8AC3E}">
+        <p14:creationId xmlns:p14="http://schemas.microsoft.com/office/powerpoint/2010/main" val="3640431140"/>
+      </p:ext>
+    </p:extLst>
+  </p:cSld>
+  <p:clrMapOvr>
+    <a:masterClrMapping/>
+  </p:clrMapOvr>
+</p:sld>
+</file>
+
+<file path=ppt/slides/slide9.xml><?xml version="1.0" encoding="utf-8"?>
+<p:sld xmlns:a="http://schemas.openxmlformats.org/drawingml/2006/main" xmlns:r="http://schemas.openxmlformats.org/officeDocument/2006/relationships" xmlns:p="http://schemas.openxmlformats.org/presentationml/2006/main">
+  <p:cSld>
+    <p:spTree>
+      <p:nvGrpSpPr>
+        <p:cNvPr id="1" name=""/>
+        <p:cNvGrpSpPr/>
+        <p:nvPr/>
+      </p:nvGrpSpPr>
+      <p:grpSpPr>
+        <a:xfrm>
+          <a:off x="0" y="0"/>
+          <a:ext cx="0" cy="0"/>
+          <a:chOff x="0" y="0"/>
+          <a:chExt cx="0" cy="0"/>
+        </a:xfrm>
+      </p:grpSpPr>
+      <p:sp>
+        <p:nvSpPr>
+          <p:cNvPr id="2" name="제목 1"/>
+          <p:cNvSpPr>
+            <a:spLocks noGrp="1"/>
+          </p:cNvSpPr>
+          <p:nvPr>
+            <p:ph type="title"/>
+          </p:nvPr>
+        </p:nvSpPr>
+        <p:spPr/>
+        <p:txBody>
+          <a:bodyPr/>
+          <a:lstStyle/>
+          <a:p>
+            <a:r>
+              <a:rPr lang="ko-KR" altLang="en-US" smtClean="0"/>
+              <a:t>엑셀 파일에 이미지 넣기</a:t>
+            </a:r>
+            <a:endParaRPr lang="ko-KR" altLang="en-US"/>
+          </a:p>
+        </p:txBody>
+      </p:sp>
+      <p:sp>
+        <p:nvSpPr>
+          <p:cNvPr id="3" name="내용 개체 틀 2"/>
+          <p:cNvSpPr>
+            <a:spLocks noGrp="1"/>
+          </p:cNvSpPr>
+          <p:nvPr>
+            <p:ph idx="1"/>
+          </p:nvPr>
+        </p:nvSpPr>
+        <p:spPr/>
+        <p:txBody>
+          <a:bodyPr/>
+          <a:lstStyle/>
+          <a:p>
+            <a:r>
+              <a:rPr lang="ko-KR" altLang="en-US" smtClean="0"/>
+              <a:t>넣고 싶은 이미지 파일을 파일로 저장하기</a:t>
+            </a:r>
+            <a:endParaRPr lang="en-US" altLang="ko-KR" smtClean="0"/>
+          </a:p>
+          <a:p>
+            <a:endParaRPr lang="en-US" altLang="ko-KR"/>
+          </a:p>
+          <a:p>
+            <a:r>
+              <a:rPr lang="ko-KR" altLang="en-US" smtClean="0"/>
+              <a:t>이미지를 넣고 싶은 셀 우클릭 → 메모 서식 → </a:t>
+            </a:r>
+            <a:r>
+              <a:rPr lang="ko-KR" altLang="en-US"/>
+              <a:t>메모의 테두리 </a:t>
+            </a:r>
+            <a:r>
+              <a:rPr lang="ko-KR" altLang="en-US"/>
+              <a:t>클릭 </a:t>
+            </a:r>
+            <a:r>
+              <a:rPr lang="ko-KR" altLang="en-US" smtClean="0"/>
+              <a:t>후 메모서식 → 색 및 선 → 채우기 → 채우기 효과 → 그림 → 로컬 파일에 저장한 이미지 → 그림의 가로세로비율 고정 </a:t>
+            </a:r>
+            <a:r>
+              <a:rPr lang="en-US" altLang="ko-KR" smtClean="0"/>
+              <a:t>‘</a:t>
+            </a:r>
+            <a:r>
+              <a:rPr lang="ko-KR" altLang="en-US" smtClean="0"/>
+              <a:t>해제</a:t>
+            </a:r>
+            <a:r>
+              <a:rPr lang="en-US" altLang="ko-KR" smtClean="0"/>
+              <a:t>’</a:t>
+            </a:r>
+            <a:endParaRPr lang="en-US" altLang="ko-KR"/>
+          </a:p>
+          <a:p>
+            <a:r>
+              <a:rPr lang="en-US" altLang="ko-KR" smtClean="0"/>
+              <a:t>‘</a:t>
+            </a:r>
+            <a:r>
+              <a:rPr lang="ko-KR" altLang="en-US" smtClean="0"/>
+              <a:t>메모 표시 숨기기</a:t>
+            </a:r>
+            <a:r>
+              <a:rPr lang="en-US" altLang="ko-KR" smtClean="0"/>
+              <a:t>＇</a:t>
+            </a:r>
+            <a:r>
+              <a:rPr lang="ko-KR" altLang="en-US" smtClean="0"/>
+              <a:t>가 </a:t>
+            </a:r>
+            <a:r>
+              <a:rPr lang="en-US" altLang="ko-KR" smtClean="0"/>
+              <a:t>default.</a:t>
+            </a:r>
+          </a:p>
+          <a:p>
+            <a:pPr lvl="1"/>
+            <a:r>
+              <a:rPr lang="ko-KR" altLang="en-US"/>
+              <a:t>메모 넣은 셀을 </a:t>
+            </a:r>
+            <a:r>
+              <a:rPr lang="ko-KR" altLang="en-US"/>
+              <a:t>우클릭해서 </a:t>
+            </a:r>
+            <a:r>
+              <a:rPr lang="en-US" altLang="ko-KR" smtClean="0"/>
+              <a:t>‘</a:t>
+            </a:r>
+            <a:r>
+              <a:rPr lang="ko-KR" altLang="en-US" smtClean="0"/>
+              <a:t>메모 표시 숨기기</a:t>
+            </a:r>
+            <a:r>
+              <a:rPr lang="en-US" altLang="ko-KR" smtClean="0"/>
+              <a:t>＇</a:t>
+            </a:r>
+            <a:r>
+              <a:rPr lang="ko-KR" altLang="en-US" smtClean="0"/>
+              <a:t>를 한 번 더 클릭하면 항상 메모가 떠있게 할 수 있다</a:t>
+            </a:r>
+            <a:r>
+              <a:rPr lang="en-US" altLang="ko-KR" smtClean="0"/>
+              <a:t>.</a:t>
+            </a:r>
+            <a:endParaRPr lang="ko-KR" altLang="en-US"/>
+          </a:p>
+        </p:txBody>
+      </p:sp>
+    </p:spTree>
+    <p:extLst>
+      <p:ext uri="{BB962C8B-B14F-4D97-AF65-F5344CB8AC3E}">
+        <p14:creationId xmlns:p14="http://schemas.microsoft.com/office/powerpoint/2010/main" val="2292259287"/>
       </p:ext>
     </p:extLst>
   </p:cSld>
